--- a/python/CourseDesign/Week09e/Week9_Lecture18_Nonparametric_Spectral_Estimation.pptx
+++ b/python/CourseDesign/Week09e/Week9_Lecture18_Nonparametric_Spectral_Estimation.pptx
@@ -5,25 +5,25 @@
     <p:sldMasterId id="2147483648" r:id="rId1"/>
   </p:sldMasterIdLst>
   <p:sldIdLst>
-    <p:sldId id="256" r:id="rId7"/>
-    <p:sldId id="257" r:id="rId8"/>
-    <p:sldId id="258" r:id="rId9"/>
-    <p:sldId id="259" r:id="rId10"/>
-    <p:sldId id="260" r:id="rId11"/>
-    <p:sldId id="261" r:id="rId12"/>
-    <p:sldId id="262" r:id="rId13"/>
-    <p:sldId id="263" r:id="rId14"/>
-    <p:sldId id="264" r:id="rId15"/>
-    <p:sldId id="265" r:id="rId16"/>
-    <p:sldId id="266" r:id="rId17"/>
-    <p:sldId id="267" r:id="rId18"/>
-    <p:sldId id="268" r:id="rId19"/>
-    <p:sldId id="269" r:id="rId20"/>
-    <p:sldId id="270" r:id="rId21"/>
-    <p:sldId id="271" r:id="rId22"/>
-    <p:sldId id="272" r:id="rId23"/>
+    <p:sldId id="256" r:id="rId2"/>
+    <p:sldId id="257" r:id="rId3"/>
+    <p:sldId id="258" r:id="rId4"/>
+    <p:sldId id="259" r:id="rId5"/>
+    <p:sldId id="260" r:id="rId6"/>
+    <p:sldId id="261" r:id="rId7"/>
+    <p:sldId id="262" r:id="rId8"/>
+    <p:sldId id="263" r:id="rId9"/>
+    <p:sldId id="264" r:id="rId10"/>
+    <p:sldId id="265" r:id="rId11"/>
+    <p:sldId id="266" r:id="rId12"/>
+    <p:sldId id="267" r:id="rId13"/>
+    <p:sldId id="268" r:id="rId14"/>
+    <p:sldId id="269" r:id="rId15"/>
+    <p:sldId id="270" r:id="rId16"/>
+    <p:sldId id="271" r:id="rId17"/>
+    <p:sldId id="272" r:id="rId18"/>
   </p:sldIdLst>
-  <p:sldSz cx="12191695" cy="6858000" type="screen4x3"/>
+  <p:sldSz cx="12192000" cy="6858000"/>
   <p:notesSz cx="6858000" cy="9144000"/>
   <p:defaultTextStyle>
     <a:defPPr>
@@ -120,6 +120,22 @@
       </a:defRPr>
     </a:lvl9pPr>
   </p:defaultTextStyle>
+  <p:extLst>
+    <p:ext uri="{EFAFB233-063F-42B5-8137-9DF3F51BA10A}">
+      <p15:sldGuideLst xmlns:p15="http://schemas.microsoft.com/office/powerpoint/2012/main">
+        <p15:guide id="1" orient="horz" pos="2160">
+          <p15:clr>
+            <a:srgbClr val="A4A3A4"/>
+          </p15:clr>
+        </p15:guide>
+        <p15:guide id="2" pos="2880">
+          <p15:clr>
+            <a:srgbClr val="A4A3A4"/>
+          </p15:clr>
+        </p15:guide>
+      </p15:sldGuideLst>
+    </p:ext>
+  </p:extLst>
 </p:presentation>
 </file>
 
@@ -161,10 +177,9 @@
           <a:lstStyle/>
           <a:p>
             <a:r>
-              <a:rPr lang="en-US" smtClean="0"/>
+              <a:rPr lang="en-US"/>
               <a:t>Click to edit Master title style</a:t>
             </a:r>
-            <a:endParaRPr lang="en-US"/>
           </a:p>
         </p:txBody>
       </p:sp>
@@ -280,10 +295,9 @@
           </a:lstStyle>
           <a:p>
             <a:r>
-              <a:rPr lang="en-US" smtClean="0"/>
+              <a:rPr lang="en-US"/>
               <a:t>Click to edit Master subtitle style</a:t>
             </a:r>
-            <a:endParaRPr lang="en-US"/>
           </a:p>
         </p:txBody>
       </p:sp>
@@ -304,7 +318,7 @@
           <a:p>
             <a:fld id="{5BCAD085-E8A6-8845-BD4E-CB4CCA059FC4}" type="datetimeFigureOut">
               <a:rPr lang="en-US" smtClean="0"/>
-              <a:t>1/27/13</a:t>
+              <a:t>9/29/2026</a:t>
             </a:fld>
             <a:endParaRPr lang="en-US"/>
           </a:p>
@@ -398,10 +412,9 @@
           <a:lstStyle/>
           <a:p>
             <a:r>
-              <a:rPr lang="en-US" smtClean="0"/>
+              <a:rPr lang="en-US"/>
               <a:t>Click to edit Master title style</a:t>
             </a:r>
-            <a:endParaRPr lang="en-US"/>
           </a:p>
         </p:txBody>
       </p:sp>
@@ -422,38 +435,37 @@
           <a:p>
             <a:pPr lvl="0"/>
             <a:r>
-              <a:rPr lang="en-US" smtClean="0"/>
+              <a:rPr lang="en-US"/>
               <a:t>Click to edit Master text styles</a:t>
             </a:r>
           </a:p>
           <a:p>
             <a:pPr lvl="1"/>
             <a:r>
-              <a:rPr lang="en-US" smtClean="0"/>
+              <a:rPr lang="en-US"/>
               <a:t>Second level</a:t>
             </a:r>
           </a:p>
           <a:p>
             <a:pPr lvl="2"/>
             <a:r>
-              <a:rPr lang="en-US" smtClean="0"/>
+              <a:rPr lang="en-US"/>
               <a:t>Third level</a:t>
             </a:r>
           </a:p>
           <a:p>
             <a:pPr lvl="3"/>
             <a:r>
-              <a:rPr lang="en-US" smtClean="0"/>
+              <a:rPr lang="en-US"/>
               <a:t>Fourth level</a:t>
             </a:r>
           </a:p>
           <a:p>
             <a:pPr lvl="4"/>
             <a:r>
-              <a:rPr lang="en-US" smtClean="0"/>
+              <a:rPr lang="en-US"/>
               <a:t>Fifth level</a:t>
             </a:r>
-            <a:endParaRPr lang="en-US"/>
           </a:p>
         </p:txBody>
       </p:sp>
@@ -474,7 +486,7 @@
           <a:p>
             <a:fld id="{5BCAD085-E8A6-8845-BD4E-CB4CCA059FC4}" type="datetimeFigureOut">
               <a:rPr lang="en-US" smtClean="0"/>
-              <a:t>1/27/13</a:t>
+              <a:t>9/29/2026</a:t>
             </a:fld>
             <a:endParaRPr lang="en-US"/>
           </a:p>
@@ -573,10 +585,9 @@
           <a:lstStyle/>
           <a:p>
             <a:r>
-              <a:rPr lang="en-US" smtClean="0"/>
+              <a:rPr lang="en-US"/>
               <a:t>Click to edit Master title style</a:t>
             </a:r>
-            <a:endParaRPr lang="en-US"/>
           </a:p>
         </p:txBody>
       </p:sp>
@@ -602,38 +613,37 @@
           <a:p>
             <a:pPr lvl="0"/>
             <a:r>
-              <a:rPr lang="en-US" smtClean="0"/>
+              <a:rPr lang="en-US"/>
               <a:t>Click to edit Master text styles</a:t>
             </a:r>
           </a:p>
           <a:p>
             <a:pPr lvl="1"/>
             <a:r>
-              <a:rPr lang="en-US" smtClean="0"/>
+              <a:rPr lang="en-US"/>
               <a:t>Second level</a:t>
             </a:r>
           </a:p>
           <a:p>
             <a:pPr lvl="2"/>
             <a:r>
-              <a:rPr lang="en-US" smtClean="0"/>
+              <a:rPr lang="en-US"/>
               <a:t>Third level</a:t>
             </a:r>
           </a:p>
           <a:p>
             <a:pPr lvl="3"/>
             <a:r>
-              <a:rPr lang="en-US" smtClean="0"/>
+              <a:rPr lang="en-US"/>
               <a:t>Fourth level</a:t>
             </a:r>
           </a:p>
           <a:p>
             <a:pPr lvl="4"/>
             <a:r>
-              <a:rPr lang="en-US" smtClean="0"/>
+              <a:rPr lang="en-US"/>
               <a:t>Fifth level</a:t>
             </a:r>
-            <a:endParaRPr lang="en-US"/>
           </a:p>
         </p:txBody>
       </p:sp>
@@ -654,7 +664,7 @@
           <a:p>
             <a:fld id="{5BCAD085-E8A6-8845-BD4E-CB4CCA059FC4}" type="datetimeFigureOut">
               <a:rPr lang="en-US" smtClean="0"/>
-              <a:t>1/27/13</a:t>
+              <a:t>9/29/2026</a:t>
             </a:fld>
             <a:endParaRPr lang="en-US"/>
           </a:p>
@@ -748,10 +758,9 @@
           <a:lstStyle/>
           <a:p>
             <a:r>
-              <a:rPr lang="en-US" smtClean="0"/>
+              <a:rPr lang="en-US"/>
               <a:t>Click to edit Master title style</a:t>
             </a:r>
-            <a:endParaRPr lang="en-US"/>
           </a:p>
         </p:txBody>
       </p:sp>
@@ -772,38 +781,37 @@
           <a:p>
             <a:pPr lvl="0"/>
             <a:r>
-              <a:rPr lang="en-US" smtClean="0"/>
+              <a:rPr lang="en-US"/>
               <a:t>Click to edit Master text styles</a:t>
             </a:r>
           </a:p>
           <a:p>
             <a:pPr lvl="1"/>
             <a:r>
-              <a:rPr lang="en-US" smtClean="0"/>
+              <a:rPr lang="en-US"/>
               <a:t>Second level</a:t>
             </a:r>
           </a:p>
           <a:p>
             <a:pPr lvl="2"/>
             <a:r>
-              <a:rPr lang="en-US" smtClean="0"/>
+              <a:rPr lang="en-US"/>
               <a:t>Third level</a:t>
             </a:r>
           </a:p>
           <a:p>
             <a:pPr lvl="3"/>
             <a:r>
-              <a:rPr lang="en-US" smtClean="0"/>
+              <a:rPr lang="en-US"/>
               <a:t>Fourth level</a:t>
             </a:r>
           </a:p>
           <a:p>
             <a:pPr lvl="4"/>
             <a:r>
-              <a:rPr lang="en-US" smtClean="0"/>
+              <a:rPr lang="en-US"/>
               <a:t>Fifth level</a:t>
             </a:r>
-            <a:endParaRPr lang="en-US"/>
           </a:p>
         </p:txBody>
       </p:sp>
@@ -824,7 +832,7 @@
           <a:p>
             <a:fld id="{5BCAD085-E8A6-8845-BD4E-CB4CCA059FC4}" type="datetimeFigureOut">
               <a:rPr lang="en-US" smtClean="0"/>
-              <a:t>1/27/13</a:t>
+              <a:t>9/29/2026</a:t>
             </a:fld>
             <a:endParaRPr lang="en-US"/>
           </a:p>
@@ -927,10 +935,9 @@
           </a:lstStyle>
           <a:p>
             <a:r>
-              <a:rPr lang="en-US" smtClean="0"/>
+              <a:rPr lang="en-US"/>
               <a:t>Click to edit Master title style</a:t>
             </a:r>
-            <a:endParaRPr lang="en-US"/>
           </a:p>
         </p:txBody>
       </p:sp>
@@ -1047,7 +1054,7 @@
           <a:p>
             <a:pPr lvl="0"/>
             <a:r>
-              <a:rPr lang="en-US" smtClean="0"/>
+              <a:rPr lang="en-US"/>
               <a:t>Click to edit Master text styles</a:t>
             </a:r>
           </a:p>
@@ -1070,7 +1077,7 @@
           <a:p>
             <a:fld id="{5BCAD085-E8A6-8845-BD4E-CB4CCA059FC4}" type="datetimeFigureOut">
               <a:rPr lang="en-US" smtClean="0"/>
-              <a:t>1/27/13</a:t>
+              <a:t>9/29/2026</a:t>
             </a:fld>
             <a:endParaRPr lang="en-US"/>
           </a:p>
@@ -1164,10 +1171,9 @@
           <a:lstStyle/>
           <a:p>
             <a:r>
-              <a:rPr lang="en-US" smtClean="0"/>
+              <a:rPr lang="en-US"/>
               <a:t>Click to edit Master title style</a:t>
             </a:r>
-            <a:endParaRPr lang="en-US"/>
           </a:p>
         </p:txBody>
       </p:sp>
@@ -1221,38 +1227,37 @@
           <a:p>
             <a:pPr lvl="0"/>
             <a:r>
-              <a:rPr lang="en-US" smtClean="0"/>
+              <a:rPr lang="en-US"/>
               <a:t>Click to edit Master text styles</a:t>
             </a:r>
           </a:p>
           <a:p>
             <a:pPr lvl="1"/>
             <a:r>
-              <a:rPr lang="en-US" smtClean="0"/>
+              <a:rPr lang="en-US"/>
               <a:t>Second level</a:t>
             </a:r>
           </a:p>
           <a:p>
             <a:pPr lvl="2"/>
             <a:r>
-              <a:rPr lang="en-US" smtClean="0"/>
+              <a:rPr lang="en-US"/>
               <a:t>Third level</a:t>
             </a:r>
           </a:p>
           <a:p>
             <a:pPr lvl="3"/>
             <a:r>
-              <a:rPr lang="en-US" smtClean="0"/>
+              <a:rPr lang="en-US"/>
               <a:t>Fourth level</a:t>
             </a:r>
           </a:p>
           <a:p>
             <a:pPr lvl="4"/>
             <a:r>
-              <a:rPr lang="en-US" smtClean="0"/>
+              <a:rPr lang="en-US"/>
               <a:t>Fifth level</a:t>
             </a:r>
-            <a:endParaRPr lang="en-US"/>
           </a:p>
         </p:txBody>
       </p:sp>
@@ -1306,38 +1311,37 @@
           <a:p>
             <a:pPr lvl="0"/>
             <a:r>
-              <a:rPr lang="en-US" smtClean="0"/>
+              <a:rPr lang="en-US"/>
               <a:t>Click to edit Master text styles</a:t>
             </a:r>
           </a:p>
           <a:p>
             <a:pPr lvl="1"/>
             <a:r>
-              <a:rPr lang="en-US" smtClean="0"/>
+              <a:rPr lang="en-US"/>
               <a:t>Second level</a:t>
             </a:r>
           </a:p>
           <a:p>
             <a:pPr lvl="2"/>
             <a:r>
-              <a:rPr lang="en-US" smtClean="0"/>
+              <a:rPr lang="en-US"/>
               <a:t>Third level</a:t>
             </a:r>
           </a:p>
           <a:p>
             <a:pPr lvl="3"/>
             <a:r>
-              <a:rPr lang="en-US" smtClean="0"/>
+              <a:rPr lang="en-US"/>
               <a:t>Fourth level</a:t>
             </a:r>
           </a:p>
           <a:p>
             <a:pPr lvl="4"/>
             <a:r>
-              <a:rPr lang="en-US" smtClean="0"/>
+              <a:rPr lang="en-US"/>
               <a:t>Fifth level</a:t>
             </a:r>
-            <a:endParaRPr lang="en-US"/>
           </a:p>
         </p:txBody>
       </p:sp>
@@ -1358,7 +1362,7 @@
           <a:p>
             <a:fld id="{5BCAD085-E8A6-8845-BD4E-CB4CCA059FC4}" type="datetimeFigureOut">
               <a:rPr lang="en-US" smtClean="0"/>
-              <a:t>1/27/13</a:t>
+              <a:t>9/29/2026</a:t>
             </a:fld>
             <a:endParaRPr lang="en-US"/>
           </a:p>
@@ -1456,10 +1460,9 @@
           </a:lstStyle>
           <a:p>
             <a:r>
-              <a:rPr lang="en-US" smtClean="0"/>
+              <a:rPr lang="en-US"/>
               <a:t>Click to edit Master title style</a:t>
             </a:r>
-            <a:endParaRPr lang="en-US"/>
           </a:p>
         </p:txBody>
       </p:sp>
@@ -1522,7 +1525,7 @@
           <a:p>
             <a:pPr lvl="0"/>
             <a:r>
-              <a:rPr lang="en-US" smtClean="0"/>
+              <a:rPr lang="en-US"/>
               <a:t>Click to edit Master text styles</a:t>
             </a:r>
           </a:p>
@@ -1578,38 +1581,37 @@
           <a:p>
             <a:pPr lvl="0"/>
             <a:r>
-              <a:rPr lang="en-US" smtClean="0"/>
+              <a:rPr lang="en-US"/>
               <a:t>Click to edit Master text styles</a:t>
             </a:r>
           </a:p>
           <a:p>
             <a:pPr lvl="1"/>
             <a:r>
-              <a:rPr lang="en-US" smtClean="0"/>
+              <a:rPr lang="en-US"/>
               <a:t>Second level</a:t>
             </a:r>
           </a:p>
           <a:p>
             <a:pPr lvl="2"/>
             <a:r>
-              <a:rPr lang="en-US" smtClean="0"/>
+              <a:rPr lang="en-US"/>
               <a:t>Third level</a:t>
             </a:r>
           </a:p>
           <a:p>
             <a:pPr lvl="3"/>
             <a:r>
-              <a:rPr lang="en-US" smtClean="0"/>
+              <a:rPr lang="en-US"/>
               <a:t>Fourth level</a:t>
             </a:r>
           </a:p>
           <a:p>
             <a:pPr lvl="4"/>
             <a:r>
-              <a:rPr lang="en-US" smtClean="0"/>
+              <a:rPr lang="en-US"/>
               <a:t>Fifth level</a:t>
             </a:r>
-            <a:endParaRPr lang="en-US"/>
           </a:p>
         </p:txBody>
       </p:sp>
@@ -1672,7 +1674,7 @@
           <a:p>
             <a:pPr lvl="0"/>
             <a:r>
-              <a:rPr lang="en-US" smtClean="0"/>
+              <a:rPr lang="en-US"/>
               <a:t>Click to edit Master text styles</a:t>
             </a:r>
           </a:p>
@@ -1728,38 +1730,37 @@
           <a:p>
             <a:pPr lvl="0"/>
             <a:r>
-              <a:rPr lang="en-US" smtClean="0"/>
+              <a:rPr lang="en-US"/>
               <a:t>Click to edit Master text styles</a:t>
             </a:r>
           </a:p>
           <a:p>
             <a:pPr lvl="1"/>
             <a:r>
-              <a:rPr lang="en-US" smtClean="0"/>
+              <a:rPr lang="en-US"/>
               <a:t>Second level</a:t>
             </a:r>
           </a:p>
           <a:p>
             <a:pPr lvl="2"/>
             <a:r>
-              <a:rPr lang="en-US" smtClean="0"/>
+              <a:rPr lang="en-US"/>
               <a:t>Third level</a:t>
             </a:r>
           </a:p>
           <a:p>
             <a:pPr lvl="3"/>
             <a:r>
-              <a:rPr lang="en-US" smtClean="0"/>
+              <a:rPr lang="en-US"/>
               <a:t>Fourth level</a:t>
             </a:r>
           </a:p>
           <a:p>
             <a:pPr lvl="4"/>
             <a:r>
-              <a:rPr lang="en-US" smtClean="0"/>
+              <a:rPr lang="en-US"/>
               <a:t>Fifth level</a:t>
             </a:r>
-            <a:endParaRPr lang="en-US"/>
           </a:p>
         </p:txBody>
       </p:sp>
@@ -1780,7 +1781,7 @@
           <a:p>
             <a:fld id="{5BCAD085-E8A6-8845-BD4E-CB4CCA059FC4}" type="datetimeFigureOut">
               <a:rPr lang="en-US" smtClean="0"/>
-              <a:t>1/27/13</a:t>
+              <a:t>9/29/2026</a:t>
             </a:fld>
             <a:endParaRPr lang="en-US"/>
           </a:p>
@@ -1874,10 +1875,9 @@
           <a:lstStyle/>
           <a:p>
             <a:r>
-              <a:rPr lang="en-US" smtClean="0"/>
+              <a:rPr lang="en-US"/>
               <a:t>Click to edit Master title style</a:t>
             </a:r>
-            <a:endParaRPr lang="en-US"/>
           </a:p>
         </p:txBody>
       </p:sp>
@@ -1898,7 +1898,7 @@
           <a:p>
             <a:fld id="{5BCAD085-E8A6-8845-BD4E-CB4CCA059FC4}" type="datetimeFigureOut">
               <a:rPr lang="en-US" smtClean="0"/>
-              <a:t>1/27/13</a:t>
+              <a:t>9/29/2026</a:t>
             </a:fld>
             <a:endParaRPr lang="en-US"/>
           </a:p>
@@ -1993,7 +1993,7 @@
           <a:p>
             <a:fld id="{5BCAD085-E8A6-8845-BD4E-CB4CCA059FC4}" type="datetimeFigureOut">
               <a:rPr lang="en-US" smtClean="0"/>
-              <a:t>1/27/13</a:t>
+              <a:t>9/29/2026</a:t>
             </a:fld>
             <a:endParaRPr lang="en-US"/>
           </a:p>
@@ -2096,10 +2096,9 @@
           </a:lstStyle>
           <a:p>
             <a:r>
-              <a:rPr lang="en-US" smtClean="0"/>
+              <a:rPr lang="en-US"/>
               <a:t>Click to edit Master title style</a:t>
             </a:r>
-            <a:endParaRPr lang="en-US"/>
           </a:p>
         </p:txBody>
       </p:sp>
@@ -2153,38 +2152,37 @@
           <a:p>
             <a:pPr lvl="0"/>
             <a:r>
-              <a:rPr lang="en-US" smtClean="0"/>
+              <a:rPr lang="en-US"/>
               <a:t>Click to edit Master text styles</a:t>
             </a:r>
           </a:p>
           <a:p>
             <a:pPr lvl="1"/>
             <a:r>
-              <a:rPr lang="en-US" smtClean="0"/>
+              <a:rPr lang="en-US"/>
               <a:t>Second level</a:t>
             </a:r>
           </a:p>
           <a:p>
             <a:pPr lvl="2"/>
             <a:r>
-              <a:rPr lang="en-US" smtClean="0"/>
+              <a:rPr lang="en-US"/>
               <a:t>Third level</a:t>
             </a:r>
           </a:p>
           <a:p>
             <a:pPr lvl="3"/>
             <a:r>
-              <a:rPr lang="en-US" smtClean="0"/>
+              <a:rPr lang="en-US"/>
               <a:t>Fourth level</a:t>
             </a:r>
           </a:p>
           <a:p>
             <a:pPr lvl="4"/>
             <a:r>
-              <a:rPr lang="en-US" smtClean="0"/>
+              <a:rPr lang="en-US"/>
               <a:t>Fifth level</a:t>
             </a:r>
-            <a:endParaRPr lang="en-US"/>
           </a:p>
         </p:txBody>
       </p:sp>
@@ -2247,7 +2245,7 @@
           <a:p>
             <a:pPr lvl="0"/>
             <a:r>
-              <a:rPr lang="en-US" smtClean="0"/>
+              <a:rPr lang="en-US"/>
               <a:t>Click to edit Master text styles</a:t>
             </a:r>
           </a:p>
@@ -2270,7 +2268,7 @@
           <a:p>
             <a:fld id="{5BCAD085-E8A6-8845-BD4E-CB4CCA059FC4}" type="datetimeFigureOut">
               <a:rPr lang="en-US" smtClean="0"/>
-              <a:t>1/27/13</a:t>
+              <a:t>9/29/2026</a:t>
             </a:fld>
             <a:endParaRPr lang="en-US"/>
           </a:p>
@@ -2373,10 +2371,9 @@
           </a:lstStyle>
           <a:p>
             <a:r>
-              <a:rPr lang="en-US" smtClean="0"/>
+              <a:rPr lang="en-US"/>
               <a:t>Click to edit Master title style</a:t>
             </a:r>
-            <a:endParaRPr lang="en-US"/>
           </a:p>
         </p:txBody>
       </p:sp>
@@ -2500,7 +2497,7 @@
           <a:p>
             <a:pPr lvl="0"/>
             <a:r>
-              <a:rPr lang="en-US" smtClean="0"/>
+              <a:rPr lang="en-US"/>
               <a:t>Click to edit Master text styles</a:t>
             </a:r>
           </a:p>
@@ -2523,7 +2520,7 @@
           <a:p>
             <a:fld id="{5BCAD085-E8A6-8845-BD4E-CB4CCA059FC4}" type="datetimeFigureOut">
               <a:rPr lang="en-US" smtClean="0"/>
-              <a:t>1/27/13</a:t>
+              <a:t>9/29/2026</a:t>
             </a:fld>
             <a:endParaRPr lang="en-US"/>
           </a:p>
@@ -2632,10 +2629,9 @@
           <a:lstStyle/>
           <a:p>
             <a:r>
-              <a:rPr lang="en-US" smtClean="0"/>
+              <a:rPr lang="en-US"/>
               <a:t>Click to edit Master title style</a:t>
             </a:r>
-            <a:endParaRPr lang="en-US"/>
           </a:p>
         </p:txBody>
       </p:sp>
@@ -2666,38 +2662,37 @@
           <a:p>
             <a:pPr lvl="0"/>
             <a:r>
-              <a:rPr lang="en-US" smtClean="0"/>
+              <a:rPr lang="en-US"/>
               <a:t>Click to edit Master text styles</a:t>
             </a:r>
           </a:p>
           <a:p>
             <a:pPr lvl="1"/>
             <a:r>
-              <a:rPr lang="en-US" smtClean="0"/>
+              <a:rPr lang="en-US"/>
               <a:t>Second level</a:t>
             </a:r>
           </a:p>
           <a:p>
             <a:pPr lvl="2"/>
             <a:r>
-              <a:rPr lang="en-US" smtClean="0"/>
+              <a:rPr lang="en-US"/>
               <a:t>Third level</a:t>
             </a:r>
           </a:p>
           <a:p>
             <a:pPr lvl="3"/>
             <a:r>
-              <a:rPr lang="en-US" smtClean="0"/>
+              <a:rPr lang="en-US"/>
               <a:t>Fourth level</a:t>
             </a:r>
           </a:p>
           <a:p>
             <a:pPr lvl="4"/>
             <a:r>
-              <a:rPr lang="en-US" smtClean="0"/>
+              <a:rPr lang="en-US"/>
               <a:t>Fifth level</a:t>
             </a:r>
-            <a:endParaRPr lang="en-US"/>
           </a:p>
         </p:txBody>
       </p:sp>
@@ -2736,7 +2731,7 @@
           <a:p>
             <a:fld id="{5BCAD085-E8A6-8845-BD4E-CB4CCA059FC4}" type="datetimeFigureOut">
               <a:rPr lang="en-US" smtClean="0"/>
-              <a:t>1/27/13</a:t>
+              <a:t>9/29/2026</a:t>
             </a:fld>
             <a:endParaRPr lang="en-US"/>
           </a:p>
@@ -3095,7 +3090,7 @@
 </file>
 
 <file path=ppt/slides/slide1.xml><?xml version="1.0" encoding="utf-8"?>
-<p:sld xmlns:a="http://schemas.openxmlformats.org/drawingml/2006/main" xmlns:p="http://schemas.openxmlformats.org/presentationml/2006/main" xmlns:r="http://schemas.openxmlformats.org/officeDocument/2006/relationships">
+<p:sld xmlns:a="http://schemas.openxmlformats.org/drawingml/2006/main" xmlns:r="http://schemas.openxmlformats.org/officeDocument/2006/relationships" xmlns:p="http://schemas.openxmlformats.org/presentationml/2006/main">
   <p:cSld>
     <p:bg>
       <p:bgPr>
@@ -3111,7 +3106,14 @@
         <p:cNvGrpSpPr/>
         <p:nvPr/>
       </p:nvGrpSpPr>
-      <p:grpSpPr/>
+      <p:grpSpPr>
+        <a:xfrm>
+          <a:off x="0" y="0"/>
+          <a:ext cx="0" cy="0"/>
+          <a:chOff x="0" y="0"/>
+          <a:chExt cx="0" cy="0"/>
+        </a:xfrm>
+      </p:grpSpPr>
       <p:sp>
         <p:nvSpPr>
           <p:cNvPr id="2" name="TextBox 1"/>
@@ -3136,7 +3138,16 @@
           <a:p>
             <a:pPr algn="l"/>
             <a:r>
-              <a:rPr sz="1400" b="1">
+              <a:rPr lang="en-US" sz="1400" b="1" dirty="0">
+                <a:solidFill>
+                  <a:srgbClr val="24888E"/>
+                </a:solidFill>
+                <a:latin typeface="Aptos"/>
+              </a:rPr>
+              <a:t>WEEK 9 ● </a:t>
+            </a:r>
+            <a:r>
+              <a:rPr sz="1400" b="1" dirty="0">
                 <a:solidFill>
                   <a:srgbClr val="24888E"/>
                 </a:solidFill>
@@ -3261,7 +3272,7 @@
 </file>
 
 <file path=ppt/slides/slide10.xml><?xml version="1.0" encoding="utf-8"?>
-<p:sld xmlns:a="http://schemas.openxmlformats.org/drawingml/2006/main" xmlns:p="http://schemas.openxmlformats.org/presentationml/2006/main" xmlns:r="http://schemas.openxmlformats.org/officeDocument/2006/relationships">
+<p:sld xmlns:a="http://schemas.openxmlformats.org/drawingml/2006/main" xmlns:r="http://schemas.openxmlformats.org/officeDocument/2006/relationships" xmlns:p="http://schemas.openxmlformats.org/presentationml/2006/main">
   <p:cSld>
     <p:bg>
       <p:bgPr>
@@ -3277,7 +3288,14 @@
         <p:cNvGrpSpPr/>
         <p:nvPr/>
       </p:nvGrpSpPr>
-      <p:grpSpPr/>
+      <p:grpSpPr>
+        <a:xfrm>
+          <a:off x="0" y="0"/>
+          <a:ext cx="0" cy="0"/>
+          <a:chOff x="0" y="0"/>
+          <a:chExt cx="0" cy="0"/>
+        </a:xfrm>
+      </p:grpSpPr>
       <p:sp>
         <p:nvSpPr>
           <p:cNvPr id="2" name="Rectangle 1"/>
@@ -3318,6 +3336,7 @@
           <a:lstStyle/>
           <a:p>
             <a:pPr algn="ctr"/>
+            <a:endParaRPr/>
           </a:p>
         </p:txBody>
       </p:sp>
@@ -3564,8 +3583,8 @@
         </p:nvSpPr>
         <p:spPr>
           <a:xfrm>
-            <a:off x="6995160" y="4297680"/>
-            <a:ext cx="4160520" cy="1234440"/>
+            <a:off x="6995160" y="4297679"/>
+            <a:ext cx="4160520" cy="1321627"/>
           </a:xfrm>
           <a:prstGeom prst="roundRect">
             <a:avLst/>
@@ -3598,6 +3617,7 @@
           <a:lstStyle/>
           <a:p>
             <a:pPr algn="ctr"/>
+            <a:endParaRPr/>
           </a:p>
         </p:txBody>
       </p:sp>
@@ -3680,7 +3700,7 @@
 </file>
 
 <file path=ppt/slides/slide11.xml><?xml version="1.0" encoding="utf-8"?>
-<p:sld xmlns:a="http://schemas.openxmlformats.org/drawingml/2006/main" xmlns:p="http://schemas.openxmlformats.org/presentationml/2006/main" xmlns:r="http://schemas.openxmlformats.org/officeDocument/2006/relationships">
+<p:sld xmlns:a="http://schemas.openxmlformats.org/drawingml/2006/main" xmlns:r="http://schemas.openxmlformats.org/officeDocument/2006/relationships" xmlns:p="http://schemas.openxmlformats.org/presentationml/2006/main">
   <p:cSld>
     <p:bg>
       <p:bgPr>
@@ -3696,7 +3716,14 @@
         <p:cNvGrpSpPr/>
         <p:nvPr/>
       </p:nvGrpSpPr>
-      <p:grpSpPr/>
+      <p:grpSpPr>
+        <a:xfrm>
+          <a:off x="0" y="0"/>
+          <a:ext cx="0" cy="0"/>
+          <a:chOff x="0" y="0"/>
+          <a:chExt cx="0" cy="0"/>
+        </a:xfrm>
+      </p:grpSpPr>
       <p:sp>
         <p:nvSpPr>
           <p:cNvPr id="2" name="Rectangle 1"/>
@@ -3737,6 +3764,7 @@
           <a:lstStyle/>
           <a:p>
             <a:pPr algn="ctr"/>
+            <a:endParaRPr/>
           </a:p>
         </p:txBody>
       </p:sp>
@@ -3946,6 +3974,7 @@
           <a:lstStyle/>
           <a:p>
             <a:pPr algn="ctr"/>
+            <a:endParaRPr/>
           </a:p>
         </p:txBody>
       </p:sp>
@@ -4061,6 +4090,7 @@
           <a:lstStyle/>
           <a:p>
             <a:pPr algn="ctr"/>
+            <a:endParaRPr/>
           </a:p>
         </p:txBody>
       </p:sp>
@@ -4143,7 +4173,7 @@
 </file>
 
 <file path=ppt/slides/slide12.xml><?xml version="1.0" encoding="utf-8"?>
-<p:sld xmlns:a="http://schemas.openxmlformats.org/drawingml/2006/main" xmlns:p="http://schemas.openxmlformats.org/presentationml/2006/main" xmlns:r="http://schemas.openxmlformats.org/officeDocument/2006/relationships">
+<p:sld xmlns:a="http://schemas.openxmlformats.org/drawingml/2006/main" xmlns:r="http://schemas.openxmlformats.org/officeDocument/2006/relationships" xmlns:p="http://schemas.openxmlformats.org/presentationml/2006/main">
   <p:cSld>
     <p:bg>
       <p:bgPr>
@@ -4159,7 +4189,14 @@
         <p:cNvGrpSpPr/>
         <p:nvPr/>
       </p:nvGrpSpPr>
-      <p:grpSpPr/>
+      <p:grpSpPr>
+        <a:xfrm>
+          <a:off x="0" y="0"/>
+          <a:ext cx="0" cy="0"/>
+          <a:chOff x="0" y="0"/>
+          <a:chExt cx="0" cy="0"/>
+        </a:xfrm>
+      </p:grpSpPr>
       <p:sp>
         <p:nvSpPr>
           <p:cNvPr id="2" name="Rectangle 1"/>
@@ -4200,6 +4237,7 @@
           <a:lstStyle/>
           <a:p>
             <a:pPr algn="ctr"/>
+            <a:endParaRPr/>
           </a:p>
         </p:txBody>
       </p:sp>
@@ -4527,8 +4565,8 @@
         </p:nvSpPr>
         <p:spPr>
           <a:xfrm>
-            <a:off x="1920240" y="5257800"/>
-            <a:ext cx="8321040" cy="685800"/>
+            <a:off x="1920240" y="5257799"/>
+            <a:ext cx="8321040" cy="1089837"/>
           </a:xfrm>
           <a:prstGeom prst="roundRect">
             <a:avLst/>
@@ -4561,6 +4599,7 @@
           <a:lstStyle/>
           <a:p>
             <a:pPr algn="ctr"/>
+            <a:endParaRPr/>
           </a:p>
         </p:txBody>
       </p:sp>
@@ -4643,7 +4682,7 @@
 </file>
 
 <file path=ppt/slides/slide13.xml><?xml version="1.0" encoding="utf-8"?>
-<p:sld xmlns:a="http://schemas.openxmlformats.org/drawingml/2006/main" xmlns:p="http://schemas.openxmlformats.org/presentationml/2006/main" xmlns:r="http://schemas.openxmlformats.org/officeDocument/2006/relationships">
+<p:sld xmlns:a="http://schemas.openxmlformats.org/drawingml/2006/main" xmlns:r="http://schemas.openxmlformats.org/officeDocument/2006/relationships" xmlns:p="http://schemas.openxmlformats.org/presentationml/2006/main">
   <p:cSld>
     <p:bg>
       <p:bgPr>
@@ -4659,7 +4698,14 @@
         <p:cNvGrpSpPr/>
         <p:nvPr/>
       </p:nvGrpSpPr>
-      <p:grpSpPr/>
+      <p:grpSpPr>
+        <a:xfrm>
+          <a:off x="0" y="0"/>
+          <a:ext cx="0" cy="0"/>
+          <a:chOff x="0" y="0"/>
+          <a:chExt cx="0" cy="0"/>
+        </a:xfrm>
+      </p:grpSpPr>
       <p:sp>
         <p:nvSpPr>
           <p:cNvPr id="2" name="Rectangle 1"/>
@@ -4700,6 +4746,7 @@
           <a:lstStyle/>
           <a:p>
             <a:pPr algn="ctr"/>
+            <a:endParaRPr/>
           </a:p>
         </p:txBody>
       </p:sp>
@@ -5008,8 +5055,8 @@
         </p:nvSpPr>
         <p:spPr>
           <a:xfrm>
-            <a:off x="7315200" y="2880360"/>
-            <a:ext cx="3840480" cy="1828800"/>
+            <a:off x="7315200" y="2880359"/>
+            <a:ext cx="3840480" cy="1936189"/>
           </a:xfrm>
           <a:prstGeom prst="roundRect">
             <a:avLst/>
@@ -5042,6 +5089,7 @@
           <a:lstStyle/>
           <a:p>
             <a:pPr algn="ctr"/>
+            <a:endParaRPr/>
           </a:p>
         </p:txBody>
       </p:sp>
@@ -5124,7 +5172,7 @@
 </file>
 
 <file path=ppt/slides/slide14.xml><?xml version="1.0" encoding="utf-8"?>
-<p:sld xmlns:a="http://schemas.openxmlformats.org/drawingml/2006/main" xmlns:p="http://schemas.openxmlformats.org/presentationml/2006/main" xmlns:r="http://schemas.openxmlformats.org/officeDocument/2006/relationships">
+<p:sld xmlns:a="http://schemas.openxmlformats.org/drawingml/2006/main" xmlns:r="http://schemas.openxmlformats.org/officeDocument/2006/relationships" xmlns:p="http://schemas.openxmlformats.org/presentationml/2006/main">
   <p:cSld>
     <p:bg>
       <p:bgPr>
@@ -5140,7 +5188,14 @@
         <p:cNvGrpSpPr/>
         <p:nvPr/>
       </p:nvGrpSpPr>
-      <p:grpSpPr/>
+      <p:grpSpPr>
+        <a:xfrm>
+          <a:off x="0" y="0"/>
+          <a:ext cx="0" cy="0"/>
+          <a:chOff x="0" y="0"/>
+          <a:chExt cx="0" cy="0"/>
+        </a:xfrm>
+      </p:grpSpPr>
       <p:sp>
         <p:nvSpPr>
           <p:cNvPr id="2" name="Rectangle 1"/>
@@ -5181,6 +5236,7 @@
           <a:lstStyle/>
           <a:p>
             <a:pPr algn="ctr"/>
+            <a:endParaRPr/>
           </a:p>
         </p:txBody>
       </p:sp>
@@ -5462,8 +5518,8 @@
         </p:nvSpPr>
         <p:spPr>
           <a:xfrm>
-            <a:off x="6812280" y="4800600"/>
-            <a:ext cx="4251960" cy="1005840"/>
+            <a:off x="6812280" y="4800599"/>
+            <a:ext cx="4251960" cy="1616149"/>
           </a:xfrm>
           <a:prstGeom prst="roundRect">
             <a:avLst/>
@@ -5496,6 +5552,7 @@
           <a:lstStyle/>
           <a:p>
             <a:pPr algn="ctr"/>
+            <a:endParaRPr/>
           </a:p>
         </p:txBody>
       </p:sp>
@@ -5578,7 +5635,7 @@
 </file>
 
 <file path=ppt/slides/slide15.xml><?xml version="1.0" encoding="utf-8"?>
-<p:sld xmlns:a="http://schemas.openxmlformats.org/drawingml/2006/main" xmlns:p="http://schemas.openxmlformats.org/presentationml/2006/main" xmlns:r="http://schemas.openxmlformats.org/officeDocument/2006/relationships">
+<p:sld xmlns:a="http://schemas.openxmlformats.org/drawingml/2006/main" xmlns:r="http://schemas.openxmlformats.org/officeDocument/2006/relationships" xmlns:p="http://schemas.openxmlformats.org/presentationml/2006/main">
   <p:cSld>
     <p:bg>
       <p:bgPr>
@@ -5594,7 +5651,14 @@
         <p:cNvGrpSpPr/>
         <p:nvPr/>
       </p:nvGrpSpPr>
-      <p:grpSpPr/>
+      <p:grpSpPr>
+        <a:xfrm>
+          <a:off x="0" y="0"/>
+          <a:ext cx="0" cy="0"/>
+          <a:chOff x="0" y="0"/>
+          <a:chExt cx="0" cy="0"/>
+        </a:xfrm>
+      </p:grpSpPr>
       <p:sp>
         <p:nvSpPr>
           <p:cNvPr id="2" name="Rectangle 1"/>
@@ -5635,6 +5699,7 @@
           <a:lstStyle/>
           <a:p>
             <a:pPr algn="ctr"/>
+            <a:endParaRPr/>
           </a:p>
         </p:txBody>
       </p:sp>
@@ -5925,7 +5990,7 @@
         <p:spPr>
           <a:xfrm>
             <a:off x="8092440" y="1783080"/>
-            <a:ext cx="3154680" cy="2331720"/>
+            <a:ext cx="3154680" cy="2406148"/>
           </a:xfrm>
           <a:prstGeom prst="roundRect">
             <a:avLst/>
@@ -5958,6 +6023,7 @@
           <a:lstStyle/>
           <a:p>
             <a:pPr algn="ctr"/>
+            <a:endParaRPr/>
           </a:p>
         </p:txBody>
       </p:sp>
@@ -6040,7 +6106,7 @@
 </file>
 
 <file path=ppt/slides/slide16.xml><?xml version="1.0" encoding="utf-8"?>
-<p:sld xmlns:a="http://schemas.openxmlformats.org/drawingml/2006/main" xmlns:p="http://schemas.openxmlformats.org/presentationml/2006/main" xmlns:r="http://schemas.openxmlformats.org/officeDocument/2006/relationships">
+<p:sld xmlns:a="http://schemas.openxmlformats.org/drawingml/2006/main" xmlns:r="http://schemas.openxmlformats.org/officeDocument/2006/relationships" xmlns:p="http://schemas.openxmlformats.org/presentationml/2006/main">
   <p:cSld>
     <p:bg>
       <p:bgPr>
@@ -6056,7 +6122,14 @@
         <p:cNvGrpSpPr/>
         <p:nvPr/>
       </p:nvGrpSpPr>
-      <p:grpSpPr/>
+      <p:grpSpPr>
+        <a:xfrm>
+          <a:off x="0" y="0"/>
+          <a:ext cx="0" cy="0"/>
+          <a:chOff x="0" y="0"/>
+          <a:chExt cx="0" cy="0"/>
+        </a:xfrm>
+      </p:grpSpPr>
       <p:sp>
         <p:nvSpPr>
           <p:cNvPr id="2" name="Rectangle 1"/>
@@ -6097,6 +6170,7 @@
           <a:lstStyle/>
           <a:p>
             <a:pPr algn="ctr"/>
+            <a:endParaRPr/>
           </a:p>
         </p:txBody>
       </p:sp>
@@ -6369,6 +6443,7 @@
           <a:lstStyle/>
           <a:p>
             <a:pPr algn="ctr"/>
+            <a:endParaRPr/>
           </a:p>
         </p:txBody>
       </p:sp>
@@ -6486,7 +6561,7 @@
 </file>
 
 <file path=ppt/slides/slide17.xml><?xml version="1.0" encoding="utf-8"?>
-<p:sld xmlns:a="http://schemas.openxmlformats.org/drawingml/2006/main" xmlns:p="http://schemas.openxmlformats.org/presentationml/2006/main" xmlns:r="http://schemas.openxmlformats.org/officeDocument/2006/relationships">
+<p:sld xmlns:a="http://schemas.openxmlformats.org/drawingml/2006/main" xmlns:r="http://schemas.openxmlformats.org/officeDocument/2006/relationships" xmlns:p="http://schemas.openxmlformats.org/presentationml/2006/main">
   <p:cSld>
     <p:bg>
       <p:bgPr>
@@ -6502,7 +6577,14 @@
         <p:cNvGrpSpPr/>
         <p:nvPr/>
       </p:nvGrpSpPr>
-      <p:grpSpPr/>
+      <p:grpSpPr>
+        <a:xfrm>
+          <a:off x="0" y="0"/>
+          <a:ext cx="0" cy="0"/>
+          <a:chOff x="0" y="0"/>
+          <a:chExt cx="0" cy="0"/>
+        </a:xfrm>
+      </p:grpSpPr>
       <p:sp>
         <p:nvSpPr>
           <p:cNvPr id="2" name="Rectangle 1"/>
@@ -6543,6 +6625,7 @@
           <a:lstStyle/>
           <a:p>
             <a:pPr algn="ctr"/>
+            <a:endParaRPr/>
           </a:p>
         </p:txBody>
       </p:sp>
@@ -6831,6 +6914,7 @@
           <a:lstStyle/>
           <a:p>
             <a:pPr algn="ctr"/>
+            <a:endParaRPr/>
           </a:p>
         </p:txBody>
       </p:sp>
@@ -6913,7 +6997,7 @@
 </file>
 
 <file path=ppt/slides/slide2.xml><?xml version="1.0" encoding="utf-8"?>
-<p:sld xmlns:a="http://schemas.openxmlformats.org/drawingml/2006/main" xmlns:p="http://schemas.openxmlformats.org/presentationml/2006/main" xmlns:r="http://schemas.openxmlformats.org/officeDocument/2006/relationships">
+<p:sld xmlns:a="http://schemas.openxmlformats.org/drawingml/2006/main" xmlns:r="http://schemas.openxmlformats.org/officeDocument/2006/relationships" xmlns:p="http://schemas.openxmlformats.org/presentationml/2006/main">
   <p:cSld>
     <p:bg>
       <p:bgPr>
@@ -6929,7 +7013,14 @@
         <p:cNvGrpSpPr/>
         <p:nvPr/>
       </p:nvGrpSpPr>
-      <p:grpSpPr/>
+      <p:grpSpPr>
+        <a:xfrm>
+          <a:off x="0" y="0"/>
+          <a:ext cx="0" cy="0"/>
+          <a:chOff x="0" y="0"/>
+          <a:chExt cx="0" cy="0"/>
+        </a:xfrm>
+      </p:grpSpPr>
       <p:sp>
         <p:nvSpPr>
           <p:cNvPr id="2" name="Rectangle 1"/>
@@ -6970,6 +7061,7 @@
           <a:lstStyle/>
           <a:p>
             <a:pPr algn="ctr"/>
+            <a:endParaRPr/>
           </a:p>
         </p:txBody>
       </p:sp>
@@ -7258,6 +7350,7 @@
           <a:lstStyle/>
           <a:p>
             <a:pPr algn="ctr"/>
+            <a:endParaRPr/>
           </a:p>
         </p:txBody>
       </p:sp>
@@ -7340,7 +7433,7 @@
 </file>
 
 <file path=ppt/slides/slide3.xml><?xml version="1.0" encoding="utf-8"?>
-<p:sld xmlns:a="http://schemas.openxmlformats.org/drawingml/2006/main" xmlns:p="http://schemas.openxmlformats.org/presentationml/2006/main" xmlns:r="http://schemas.openxmlformats.org/officeDocument/2006/relationships">
+<p:sld xmlns:a="http://schemas.openxmlformats.org/drawingml/2006/main" xmlns:r="http://schemas.openxmlformats.org/officeDocument/2006/relationships" xmlns:p="http://schemas.openxmlformats.org/presentationml/2006/main">
   <p:cSld>
     <p:bg>
       <p:bgPr>
@@ -7356,7 +7449,14 @@
         <p:cNvGrpSpPr/>
         <p:nvPr/>
       </p:nvGrpSpPr>
-      <p:grpSpPr/>
+      <p:grpSpPr>
+        <a:xfrm>
+          <a:off x="0" y="0"/>
+          <a:ext cx="0" cy="0"/>
+          <a:chOff x="0" y="0"/>
+          <a:chExt cx="0" cy="0"/>
+        </a:xfrm>
+      </p:grpSpPr>
       <p:sp>
         <p:nvSpPr>
           <p:cNvPr id="2" name="Rectangle 1"/>
@@ -7397,6 +7497,7 @@
           <a:lstStyle/>
           <a:p>
             <a:pPr algn="ctr"/>
+            <a:endParaRPr/>
           </a:p>
         </p:txBody>
       </p:sp>
@@ -7722,6 +7823,7 @@
           <a:lstStyle/>
           <a:p>
             <a:pPr algn="ctr"/>
+            <a:endParaRPr/>
           </a:p>
         </p:txBody>
       </p:sp>
@@ -7804,7 +7906,7 @@
 </file>
 
 <file path=ppt/slides/slide4.xml><?xml version="1.0" encoding="utf-8"?>
-<p:sld xmlns:a="http://schemas.openxmlformats.org/drawingml/2006/main" xmlns:p="http://schemas.openxmlformats.org/presentationml/2006/main" xmlns:r="http://schemas.openxmlformats.org/officeDocument/2006/relationships">
+<p:sld xmlns:a="http://schemas.openxmlformats.org/drawingml/2006/main" xmlns:r="http://schemas.openxmlformats.org/officeDocument/2006/relationships" xmlns:p="http://schemas.openxmlformats.org/presentationml/2006/main">
   <p:cSld>
     <p:bg>
       <p:bgPr>
@@ -7820,7 +7922,14 @@
         <p:cNvGrpSpPr/>
         <p:nvPr/>
       </p:nvGrpSpPr>
-      <p:grpSpPr/>
+      <p:grpSpPr>
+        <a:xfrm>
+          <a:off x="0" y="0"/>
+          <a:ext cx="0" cy="0"/>
+          <a:chOff x="0" y="0"/>
+          <a:chExt cx="0" cy="0"/>
+        </a:xfrm>
+      </p:grpSpPr>
       <p:sp>
         <p:nvSpPr>
           <p:cNvPr id="2" name="Rectangle 1"/>
@@ -7861,6 +7970,7 @@
           <a:lstStyle/>
           <a:p>
             <a:pPr algn="ctr"/>
+            <a:endParaRPr/>
           </a:p>
         </p:txBody>
       </p:sp>
@@ -8186,6 +8296,7 @@
           <a:lstStyle/>
           <a:p>
             <a:pPr algn="ctr"/>
+            <a:endParaRPr/>
           </a:p>
         </p:txBody>
       </p:sp>
@@ -8268,7 +8379,7 @@
 </file>
 
 <file path=ppt/slides/slide5.xml><?xml version="1.0" encoding="utf-8"?>
-<p:sld xmlns:a="http://schemas.openxmlformats.org/drawingml/2006/main" xmlns:p="http://schemas.openxmlformats.org/presentationml/2006/main" xmlns:r="http://schemas.openxmlformats.org/officeDocument/2006/relationships">
+<p:sld xmlns:a="http://schemas.openxmlformats.org/drawingml/2006/main" xmlns:r="http://schemas.openxmlformats.org/officeDocument/2006/relationships" xmlns:p="http://schemas.openxmlformats.org/presentationml/2006/main">
   <p:cSld>
     <p:bg>
       <p:bgPr>
@@ -8284,7 +8395,14 @@
         <p:cNvGrpSpPr/>
         <p:nvPr/>
       </p:nvGrpSpPr>
-      <p:grpSpPr/>
+      <p:grpSpPr>
+        <a:xfrm>
+          <a:off x="0" y="0"/>
+          <a:ext cx="0" cy="0"/>
+          <a:chOff x="0" y="0"/>
+          <a:chExt cx="0" cy="0"/>
+        </a:xfrm>
+      </p:grpSpPr>
       <p:sp>
         <p:nvSpPr>
           <p:cNvPr id="2" name="Rectangle 1"/>
@@ -8325,6 +8443,7 @@
           <a:lstStyle/>
           <a:p>
             <a:pPr algn="ctr"/>
+            <a:endParaRPr/>
           </a:p>
         </p:txBody>
       </p:sp>
@@ -8650,6 +8769,7 @@
           <a:lstStyle/>
           <a:p>
             <a:pPr algn="ctr"/>
+            <a:endParaRPr/>
           </a:p>
         </p:txBody>
       </p:sp>
@@ -8732,7 +8852,7 @@
 </file>
 
 <file path=ppt/slides/slide6.xml><?xml version="1.0" encoding="utf-8"?>
-<p:sld xmlns:a="http://schemas.openxmlformats.org/drawingml/2006/main" xmlns:p="http://schemas.openxmlformats.org/presentationml/2006/main" xmlns:r="http://schemas.openxmlformats.org/officeDocument/2006/relationships">
+<p:sld xmlns:a="http://schemas.openxmlformats.org/drawingml/2006/main" xmlns:r="http://schemas.openxmlformats.org/officeDocument/2006/relationships" xmlns:p="http://schemas.openxmlformats.org/presentationml/2006/main">
   <p:cSld>
     <p:bg>
       <p:bgPr>
@@ -8748,7 +8868,14 @@
         <p:cNvGrpSpPr/>
         <p:nvPr/>
       </p:nvGrpSpPr>
-      <p:grpSpPr/>
+      <p:grpSpPr>
+        <a:xfrm>
+          <a:off x="0" y="0"/>
+          <a:ext cx="0" cy="0"/>
+          <a:chOff x="0" y="0"/>
+          <a:chExt cx="0" cy="0"/>
+        </a:xfrm>
+      </p:grpSpPr>
       <p:sp>
         <p:nvSpPr>
           <p:cNvPr id="2" name="Rectangle 1"/>
@@ -8789,6 +8916,7 @@
           <a:lstStyle/>
           <a:p>
             <a:pPr algn="ctr"/>
+            <a:endParaRPr/>
           </a:p>
         </p:txBody>
       </p:sp>
@@ -8998,6 +9126,7 @@
           <a:lstStyle/>
           <a:p>
             <a:pPr algn="ctr"/>
+            <a:endParaRPr/>
           </a:p>
         </p:txBody>
       </p:sp>
@@ -9115,7 +9244,7 @@
 </file>
 
 <file path=ppt/slides/slide7.xml><?xml version="1.0" encoding="utf-8"?>
-<p:sld xmlns:a="http://schemas.openxmlformats.org/drawingml/2006/main" xmlns:p="http://schemas.openxmlformats.org/presentationml/2006/main" xmlns:r="http://schemas.openxmlformats.org/officeDocument/2006/relationships">
+<p:sld xmlns:a="http://schemas.openxmlformats.org/drawingml/2006/main" xmlns:r="http://schemas.openxmlformats.org/officeDocument/2006/relationships" xmlns:p="http://schemas.openxmlformats.org/presentationml/2006/main">
   <p:cSld>
     <p:bg>
       <p:bgPr>
@@ -9131,7 +9260,14 @@
         <p:cNvGrpSpPr/>
         <p:nvPr/>
       </p:nvGrpSpPr>
-      <p:grpSpPr/>
+      <p:grpSpPr>
+        <a:xfrm>
+          <a:off x="0" y="0"/>
+          <a:ext cx="0" cy="0"/>
+          <a:chOff x="0" y="0"/>
+          <a:chExt cx="0" cy="0"/>
+        </a:xfrm>
+      </p:grpSpPr>
       <p:sp>
         <p:nvSpPr>
           <p:cNvPr id="2" name="Rectangle 1"/>
@@ -9172,6 +9308,7 @@
           <a:lstStyle/>
           <a:p>
             <a:pPr algn="ctr"/>
+            <a:endParaRPr/>
           </a:p>
         </p:txBody>
       </p:sp>
@@ -9444,6 +9581,7 @@
           <a:lstStyle/>
           <a:p>
             <a:pPr algn="ctr"/>
+            <a:endParaRPr/>
           </a:p>
         </p:txBody>
       </p:sp>
@@ -9526,7 +9664,7 @@
 </file>
 
 <file path=ppt/slides/slide8.xml><?xml version="1.0" encoding="utf-8"?>
-<p:sld xmlns:a="http://schemas.openxmlformats.org/drawingml/2006/main" xmlns:p="http://schemas.openxmlformats.org/presentationml/2006/main" xmlns:r="http://schemas.openxmlformats.org/officeDocument/2006/relationships">
+<p:sld xmlns:a="http://schemas.openxmlformats.org/drawingml/2006/main" xmlns:r="http://schemas.openxmlformats.org/officeDocument/2006/relationships" xmlns:p="http://schemas.openxmlformats.org/presentationml/2006/main">
   <p:cSld>
     <p:bg>
       <p:bgPr>
@@ -9542,7 +9680,14 @@
         <p:cNvGrpSpPr/>
         <p:nvPr/>
       </p:nvGrpSpPr>
-      <p:grpSpPr/>
+      <p:grpSpPr>
+        <a:xfrm>
+          <a:off x="0" y="0"/>
+          <a:ext cx="0" cy="0"/>
+          <a:chOff x="0" y="0"/>
+          <a:chExt cx="0" cy="0"/>
+        </a:xfrm>
+      </p:grpSpPr>
       <p:sp>
         <p:nvSpPr>
           <p:cNvPr id="2" name="Rectangle 1"/>
@@ -9583,6 +9728,7 @@
           <a:lstStyle/>
           <a:p>
             <a:pPr algn="ctr"/>
+            <a:endParaRPr/>
           </a:p>
         </p:txBody>
       </p:sp>
@@ -9943,6 +10089,7 @@
           <a:lstStyle/>
           <a:p>
             <a:pPr algn="ctr"/>
+            <a:endParaRPr/>
           </a:p>
         </p:txBody>
       </p:sp>
@@ -10025,7 +10172,7 @@
 </file>
 
 <file path=ppt/slides/slide9.xml><?xml version="1.0" encoding="utf-8"?>
-<p:sld xmlns:a="http://schemas.openxmlformats.org/drawingml/2006/main" xmlns:p="http://schemas.openxmlformats.org/presentationml/2006/main" xmlns:r="http://schemas.openxmlformats.org/officeDocument/2006/relationships">
+<p:sld xmlns:a="http://schemas.openxmlformats.org/drawingml/2006/main" xmlns:r="http://schemas.openxmlformats.org/officeDocument/2006/relationships" xmlns:p="http://schemas.openxmlformats.org/presentationml/2006/main">
   <p:cSld>
     <p:bg>
       <p:bgPr>
@@ -10041,7 +10188,14 @@
         <p:cNvGrpSpPr/>
         <p:nvPr/>
       </p:nvGrpSpPr>
-      <p:grpSpPr/>
+      <p:grpSpPr>
+        <a:xfrm>
+          <a:off x="0" y="0"/>
+          <a:ext cx="0" cy="0"/>
+          <a:chOff x="0" y="0"/>
+          <a:chExt cx="0" cy="0"/>
+        </a:xfrm>
+      </p:grpSpPr>
       <p:sp>
         <p:nvSpPr>
           <p:cNvPr id="2" name="Rectangle 1"/>
@@ -10082,6 +10236,7 @@
           <a:lstStyle/>
           <a:p>
             <a:pPr algn="ctr"/>
+            <a:endParaRPr/>
           </a:p>
         </p:txBody>
       </p:sp>
@@ -10291,6 +10446,7 @@
           <a:lstStyle/>
           <a:p>
             <a:pPr algn="ctr"/>
+            <a:endParaRPr/>
           </a:p>
         </p:txBody>
       </p:sp>
@@ -10406,6 +10562,7 @@
           <a:lstStyle/>
           <a:p>
             <a:pPr algn="ctr"/>
+            <a:endParaRPr/>
           </a:p>
         </p:txBody>
       </p:sp>
